--- a/dist/초2/국어/기초문해/초2_국어_기초문해_02_헷갈리는낱말바르게쓰기_학생용.pptx
+++ b/dist/초2/국어/기초문해/초2_국어_기초문해_02_헷갈리는낱말바르게쓰기_학생용.pptx
@@ -119,13 +119,13 @@
   <p:extLst>
     <p:ext uri="{521415D9-36F7-43E2-AB2F-B90AF26B5E84}">
       <p14:sectionLst xmlns:p14="http://schemas.microsoft.com/office/powerpoint/2010/main">
-        <p14:section name="도입" id="{e749626b-110b-9edb-752a-752f61651b09}">
+        <p14:section name="도입" id="{a8691f1a-02d9-cc19-4275-04c23b0c1370}">
           <p14:sldIdLst>
             <p14:sldId id="256"/>
             <p14:sldId id="257"/>
           </p14:sldIdLst>
         </p14:section>
-        <p14:section name="개념" id="{2194182e-d2e6-5cbe-1dfd-8cb8e1b8ee9e}">
+        <p14:section name="개념" id="{8525ac89-f664-7415-4386-24945753a95a}">
           <p14:sldIdLst>
             <p14:sldId id="258"/>
             <p14:sldId id="259"/>
@@ -133,25 +133,25 @@
             <p14:sldId id="261"/>
           </p14:sldIdLst>
         </p14:section>
-        <p14:section name="연습" id="{25d245ac-0706-8a90-fa08-49095ca21777}">
+        <p14:section name="연습" id="{38c972bd-d805-b3e9-3b09-1f34f1d4e452}">
           <p14:sldIdLst>
             <p14:sldId id="262"/>
             <p14:sldId id="263"/>
             <p14:sldId id="264"/>
           </p14:sldIdLst>
         </p14:section>
-        <p14:section name="확인" id="{73a3cea6-728f-ff44-bcd2-e9aa80e4f4c8}">
+        <p14:section name="확인" id="{06e2c7f7-6f43-b203-3c6e-b49ac079beeb}">
           <p14:sldIdLst>
             <p14:sldId id="265"/>
             <p14:sldId id="266"/>
           </p14:sldIdLst>
         </p14:section>
-        <p14:section name="정리" id="{85935e1e-6324-c897-8c7f-a942e56917ee}">
+        <p14:section name="정리" id="{88907934-158e-a9ca-fe65-a380e442670f}">
           <p14:sldIdLst>
             <p14:sldId id="267"/>
           </p14:sldIdLst>
         </p14:section>
-        <p14:section name="보충" id="{b0491d73-64fd-9081-4763-d8594ac97bca}">
+        <p14:section name="보충" id="{4064cbab-14be-7428-a737-6857651c0ddd}">
           <p14:sldIdLst>
             <p14:sldId id="268"/>
           </p14:sldIdLst>

--- a/dist/초2/국어/기초문해/초2_국어_기초문해_02_헷갈리는낱말바르게쓰기_학생용.pptx
+++ b/dist/초2/국어/기초문해/초2_국어_기초문해_02_헷갈리는낱말바르게쓰기_학생용.pptx
@@ -119,13 +119,13 @@
   <p:extLst>
     <p:ext uri="{521415D9-36F7-43E2-AB2F-B90AF26B5E84}">
       <p14:sectionLst xmlns:p14="http://schemas.microsoft.com/office/powerpoint/2010/main">
-        <p14:section name="도입" id="{a8691f1a-02d9-cc19-4275-04c23b0c1370}">
+        <p14:section name="도입" id="{2b549c7c-d908-15cd-0833-09315912c7b0}">
           <p14:sldIdLst>
             <p14:sldId id="256"/>
             <p14:sldId id="257"/>
           </p14:sldIdLst>
         </p14:section>
-        <p14:section name="개념" id="{8525ac89-f664-7415-4386-24945753a95a}">
+        <p14:section name="개념" id="{653962aa-4a84-566b-1094-b3621f5b19e8}">
           <p14:sldIdLst>
             <p14:sldId id="258"/>
             <p14:sldId id="259"/>
@@ -133,25 +133,25 @@
             <p14:sldId id="261"/>
           </p14:sldIdLst>
         </p14:section>
-        <p14:section name="연습" id="{38c972bd-d805-b3e9-3b09-1f34f1d4e452}">
+        <p14:section name="연습" id="{1ef4d834-2463-0f85-c4ae-d6c6fda4dc01}">
           <p14:sldIdLst>
             <p14:sldId id="262"/>
             <p14:sldId id="263"/>
             <p14:sldId id="264"/>
           </p14:sldIdLst>
         </p14:section>
-        <p14:section name="확인" id="{06e2c7f7-6f43-b203-3c6e-b49ac079beeb}">
+        <p14:section name="확인" id="{1b3adf2e-8866-3367-5c9a-e6b234385748}">
           <p14:sldIdLst>
             <p14:sldId id="265"/>
             <p14:sldId id="266"/>
           </p14:sldIdLst>
         </p14:section>
-        <p14:section name="정리" id="{88907934-158e-a9ca-fe65-a380e442670f}">
+        <p14:section name="정리" id="{f1d3201d-c400-9132-7d14-8da09dc0035e}">
           <p14:sldIdLst>
             <p14:sldId id="267"/>
           </p14:sldIdLst>
         </p14:section>
-        <p14:section name="보충" id="{4064cbab-14be-7428-a737-6857651c0ddd}">
+        <p14:section name="보충" id="{7cbe6451-6109-4563-b112-e30fb2df0c0c}">
           <p14:sldIdLst>
             <p14:sldId id="268"/>
           </p14:sldIdLst>
@@ -5759,7 +5759,7 @@
           </p:nvPr>
         </p:nvGraphicFramePr>
         <p:xfrm>
-          <a:off x="1522476" y="1696720"/>
+          <a:off x="1522476" y="1737360"/>
           <a:ext cx="9144000" cy="914400"/>
         </p:xfrm>
         <a:graphic>
@@ -5770,7 +5770,7 @@
                 <a:gridCol w="2743200"/>
                 <a:gridCol w="6400800"/>
               </a:tblGrid>
-              <a:tr h="650240">
+              <a:tr h="629920">
                 <a:tc>
                   <a:txBody>
                     <a:bodyPr/>
@@ -5908,7 +5908,7 @@
                   </a:tcPr>
                 </a:tc>
               </a:tr>
-              <a:tr h="650240">
+              <a:tr h="629920">
                 <a:tc>
                   <a:txBody>
                     <a:bodyPr/>
@@ -6046,7 +6046,7 @@
                   </a:tcPr>
                 </a:tc>
               </a:tr>
-              <a:tr h="650240">
+              <a:tr h="629920">
                 <a:tc>
                   <a:txBody>
                     <a:bodyPr/>
@@ -6184,7 +6184,7 @@
                   </a:tcPr>
                 </a:tc>
               </a:tr>
-              <a:tr h="650240">
+              <a:tr h="629920">
                 <a:tc>
                   <a:txBody>
                     <a:bodyPr/>
